--- a/Review 3.pptx
+++ b/Review 3.pptx
@@ -8830,7 +8830,7 @@
                 <a:latin typeface="Comic Sans MS" panose="030F0702030302020204" charset="0"/>
                 <a:cs typeface="Comic Sans MS" panose="030F0702030302020204" charset="0"/>
               </a:rPr>
-              <a:t>Source Code editor- Visual Studio COde</a:t>
+              <a:t>Source Code editor- Visual Studio Code</a:t>
             </a:r>
             <a:endParaRPr lang="en-US" sz="1800">
               <a:latin typeface="Comic Sans MS" panose="030F0702030302020204" charset="0"/>
@@ -8911,7 +8911,7 @@
                 <a:latin typeface="Comic Sans MS" panose="030F0702030302020204" charset="0"/>
                 <a:cs typeface="Comic Sans MS" panose="030F0702030302020204" charset="0"/>
               </a:rPr>
-              <a:t>Repository hosting - GitHub</a:t>
+              <a:t>Repository - GitHub</a:t>
             </a:r>
             <a:endParaRPr lang="en-US" sz="1800">
               <a:latin typeface="Comic Sans MS" panose="030F0702030302020204" charset="0"/>
@@ -8995,24 +8995,7 @@
                 <a:cs typeface="Algerian" panose="04020705040A02060702"/>
                 <a:sym typeface="Algerian" panose="04020705040A02060702"/>
               </a:rPr>
-              <a:t>proposed </a:t>
-            </a:r>
-            <a:br>
-              <a:rPr lang="en-US" b="0" u="sng">
-                <a:latin typeface="Algerian" panose="04020705040A02060702"/>
-                <a:ea typeface="Algerian" panose="04020705040A02060702"/>
-                <a:cs typeface="Algerian" panose="04020705040A02060702"/>
-                <a:sym typeface="Algerian" panose="04020705040A02060702"/>
-              </a:rPr>
-            </a:br>
-            <a:r>
-              <a:rPr lang="en-US" b="0" u="sng">
-                <a:latin typeface="Algerian" panose="04020705040A02060702"/>
-                <a:ea typeface="Algerian" panose="04020705040A02060702"/>
-                <a:cs typeface="Algerian" panose="04020705040A02060702"/>
-                <a:sym typeface="Algerian" panose="04020705040A02060702"/>
-              </a:rPr>
-              <a:t>architecture</a:t>
+              <a:t>PROPOSED ARCHITECTURE</a:t>
             </a:r>
             <a:endParaRPr lang="en-US" b="0" u="sng">
               <a:latin typeface="Algerian" panose="04020705040A02060702"/>
@@ -10042,7 +10025,7 @@
       </p:grpSpPr>
       <p:pic>
         <p:nvPicPr>
-          <p:cNvPr id="1" name="Picture Placeholder 0" descr="signup"/>
+          <p:cNvPr id="2" name="Picture Placeholder 1" descr="signup"/>
           <p:cNvPicPr>
             <a:picLocks noChangeAspect="1"/>
           </p:cNvPicPr>
@@ -10230,7 +10213,7 @@
                 <a:latin typeface="Algerian" panose="04020705040A02060702" charset="0"/>
                 <a:cs typeface="Algerian" panose="04020705040A02060702" charset="0"/>
               </a:rPr>
-              <a:t>output screenshots...</a:t>
+              <a:t>OUTPUT SCREENSHOTS...</a:t>
             </a:r>
             <a:endParaRPr lang="en-US" sz="3400" u="sng">
               <a:solidFill>
@@ -11679,7 +11662,7 @@
                 <a:cs typeface="Algerian" panose="04020705040A02060702"/>
                 <a:sym typeface="Algerian" panose="04020705040A02060702"/>
               </a:rPr>
-              <a:t>reference links</a:t>
+              <a:t>REFERENCE LINKS</a:t>
             </a:r>
             <a:r>
               <a:rPr lang="en-GB" sz="3400" u="sng">
@@ -11877,7 +11860,7 @@
                 <a:cs typeface="Algerian" panose="04020705040A02060702" charset="0"/>
                 <a:sym typeface="Algerian" panose="04020705040A02060702"/>
               </a:rPr>
-              <a:t>thank you</a:t>
+              <a:t>THANK YOU</a:t>
             </a:r>
             <a:r>
               <a:rPr lang="en-GB" sz="4000" b="0">
@@ -11966,24 +11949,15 @@
               <a:buNone/>
             </a:pPr>
             <a:r>
-              <a:rPr lang="en-US" altLang="en-GB" sz="3400" u="sng">
+              <a:rPr lang="en-US" sz="3400" u="sng">
                 <a:latin typeface="Algerian" panose="04020705040A02060702"/>
                 <a:ea typeface="Algerian" panose="04020705040A02060702"/>
                 <a:cs typeface="Algerian" panose="04020705040A02060702"/>
                 <a:sym typeface="Algerian" panose="04020705040A02060702"/>
               </a:rPr>
-              <a:t>introduction</a:t>
+              <a:t>INTRODUCTION</a:t>
             </a:r>
-            <a:r>
-              <a:rPr lang="en-GB" sz="3400" u="sng">
-                <a:latin typeface="Algerian" panose="04020705040A02060702"/>
-                <a:ea typeface="Algerian" panose="04020705040A02060702"/>
-                <a:cs typeface="Algerian" panose="04020705040A02060702"/>
-                <a:sym typeface="Algerian" panose="04020705040A02060702"/>
-              </a:rPr>
-              <a:t> </a:t>
-            </a:r>
-            <a:endParaRPr sz="3400" u="sng">
+            <a:endParaRPr lang="en-US" sz="3400" u="sng">
               <a:latin typeface="Algerian" panose="04020705040A02060702"/>
               <a:ea typeface="Algerian" panose="04020705040A02060702"/>
               <a:cs typeface="Algerian" panose="04020705040A02060702"/>
@@ -12148,13 +12122,22 @@
               <a:buNone/>
             </a:pPr>
             <a:r>
+              <a:rPr lang="en-US" sz="3400" u="sng">
+                <a:latin typeface="Algerian" panose="04020705040A02060702"/>
+                <a:ea typeface="Algerian" panose="04020705040A02060702"/>
+                <a:cs typeface="Algerian" panose="04020705040A02060702"/>
+                <a:sym typeface="Algerian" panose="04020705040A02060702"/>
+              </a:rPr>
+              <a:t>INTRODUCTION</a:t>
+            </a:r>
+            <a:r>
               <a:rPr lang="en-US" altLang="en-GB" sz="3400" u="sng">
                 <a:latin typeface="Algerian" panose="04020705040A02060702"/>
                 <a:ea typeface="Algerian" panose="04020705040A02060702"/>
                 <a:cs typeface="Algerian" panose="04020705040A02060702"/>
                 <a:sym typeface="Algerian" panose="04020705040A02060702"/>
               </a:rPr>
-              <a:t>introduction...</a:t>
+              <a:t>...</a:t>
             </a:r>
             <a:r>
               <a:rPr lang="en-GB" sz="3400" u="sng">
@@ -12480,7 +12463,7 @@
                 <a:cs typeface="Algerian" panose="04020705040A02060702"/>
                 <a:sym typeface="Algerian" panose="04020705040A02060702"/>
               </a:rPr>
-              <a:t>gaps identified</a:t>
+              <a:t>GAPS IDENTIFIED</a:t>
             </a:r>
             <a:endParaRPr lang="en-US" altLang="en-GB" sz="3400" u="sng">
               <a:latin typeface="Algerian" panose="04020705040A02060702"/>
@@ -12718,7 +12701,7 @@
                 <a:cs typeface="Algerian" panose="04020705040A02060702"/>
                 <a:sym typeface="Algerian" panose="04020705040A02060702"/>
               </a:rPr>
-              <a:t>objectives</a:t>
+              <a:t>OBJECTIVES</a:t>
             </a:r>
             <a:endParaRPr lang="en-US" altLang="en-GB" sz="3400" u="sng">
               <a:latin typeface="Algerian" panose="04020705040A02060702"/>
@@ -12936,7 +12919,7 @@
                 <a:cs typeface="Algerian" panose="04020705040A02060702"/>
                 <a:sym typeface="Algerian" panose="04020705040A02060702"/>
               </a:rPr>
-              <a:t>problem statement</a:t>
+              <a:t>PROBLEM STATEMENT</a:t>
             </a:r>
             <a:endParaRPr lang="en-US" sz="3400" u="sng">
               <a:latin typeface="Algerian" panose="04020705040A02060702"/>
